--- a/data-eng/decks/w4d2s0.pptx
+++ b/data-eng/decks/w4d2s0.pptx
@@ -6730,7 +6730,7 @@
                 <a:ea typeface="Pretendard"/>
                 <a:cs typeface="Pretendard"/>
               </a:rPr>
-              <a:t>1 Docker</a:t>
+              <a:t>1. Docker</a:t>
             </a:r>
           </a:p>
         </p:txBody>
@@ -6894,7 +6894,7 @@
                 <a:ea typeface="Pretendard"/>
                 <a:cs typeface="Pretendard"/>
               </a:rPr>
-              <a:t>2 4-1 끝 상태</a:t>
+              <a:t>2. 4-1 끝 상태</a:t>
             </a:r>
           </a:p>
         </p:txBody>
@@ -7058,7 +7058,7 @@
                 <a:ea typeface="Pretendard"/>
                 <a:cs typeface="Pretendard"/>
               </a:rPr>
-              <a:t>3 8181·8888</a:t>
+              <a:t>3. 8181·8888</a:t>
             </a:r>
           </a:p>
         </p:txBody>
@@ -7222,7 +7222,7 @@
                 <a:ea typeface="Pretendard"/>
                 <a:cs typeface="Pretendard"/>
               </a:rPr>
-              <a:t>4 이미지 둘</a:t>
+              <a:t>4. 이미지 둘</a:t>
             </a:r>
           </a:p>
         </p:txBody>
@@ -7386,7 +7386,7 @@
                 <a:ea typeface="Pretendard"/>
                 <a:cs typeface="Pretendard"/>
               </a:rPr>
-              <a:t>5 오늘 만들 것</a:t>
+              <a:t>5. 오늘 만들 것</a:t>
             </a:r>
           </a:p>
         </p:txBody>
@@ -7550,7 +7550,7 @@
                 <a:ea typeface="Pretendard"/>
                 <a:cs typeface="Pretendard"/>
               </a:rPr>
-              <a:t>6 환경 재설정</a:t>
+              <a:t>6. 환경 재설정</a:t>
             </a:r>
           </a:p>
         </p:txBody>
